--- a/字生-演示课件.pptx
+++ b/字生-演示课件.pptx
@@ -586,7 +586,7 @@
           <a:lstStyle/>
           <a:p>
             <a:r>
-              <a:t>把检测做成游戏：可以个人挑战，也可以分组抢答。题目的『知义』与『辨体』两关正是前面探究环节的知识点回流，答错的即时讲解可以顺带复习。</a:t>
+              <a:t>把检测做成游戏：可以个人挑战，也可以分组抢答。三档难度让不同基础的学生都有的玩：简单档热身、普通档日常、困难档从全字库随机出题（几乎每局都不一样，认形干扰项还同部首）。答错的即时讲解可以顺带复习前面的知识点。</a:t>
             </a:r>
           </a:p>
         </p:txBody>
@@ -5166,6 +5166,27 @@
               <a:t>三关闯关：认形 → 知义 → 辨体</a:t>
             </a:r>
           </a:p>
+          <a:p>
+            <a:pPr algn="l">
+              <a:lnSpc>
+                <a:spcPct val="118000"/>
+              </a:lnSpc>
+              <a:spcBef>
+                <a:spcPts val="600"/>
+              </a:spcBef>
+            </a:pPr>
+            <a:r>
+              <a:rPr sz="1350" b="0">
+                <a:solidFill>
+                  <a:srgbClr val="A8A296"/>
+                </a:solidFill>
+                <a:latin typeface="微软雅黑"/>
+                <a:ea typeface="微软雅黑"/>
+                <a:cs typeface="微软雅黑"/>
+              </a:rPr>
+              <a:t>三档难度可选：简单 13 题（热身）· 普通 20 题（默认）· 困难 25 题（认形从全字库随机抽取、同部首干扰）</a:t>
+            </a:r>
+          </a:p>
         </p:txBody>
       </p:sp>
       <p:pic>
@@ -5267,7 +5288,7 @@
               </a:spcBef>
             </a:pPr>
             <a:r>
-              <a:rPr sz="1400" b="0">
+              <a:rPr sz="1350" b="0">
                 <a:solidFill>
                   <a:srgbClr val="E0B36A"/>
                 </a:solidFill>
@@ -5278,7 +5299,7 @@
               <a:t>•  </a:t>
             </a:r>
             <a:r>
-              <a:rPr sz="1400" b="0">
+              <a:rPr sz="1350" b="0">
                 <a:solidFill>
                   <a:srgbClr val="E9E6DF"/>
                 </a:solidFill>
@@ -5286,7 +5307,7 @@
                 <a:ea typeface="微软雅黑"/>
                 <a:cs typeface="微软雅黑"/>
               </a:rPr>
-              <a:t>认形 10 题：看甲骨文，猜今天的字</a:t>
+              <a:t>认形：看甲骨文，猜今天的字；困难档同部首干扰</a:t>
             </a:r>
           </a:p>
           <a:p>
@@ -5299,7 +5320,7 @@
               </a:spcBef>
             </a:pPr>
             <a:r>
-              <a:rPr sz="1400" b="0">
+              <a:rPr sz="1350" b="0">
                 <a:solidFill>
                   <a:srgbClr val="E0B36A"/>
                 </a:solidFill>
@@ -5310,7 +5331,7 @@
               <a:t>•  </a:t>
             </a:r>
             <a:r>
-              <a:rPr sz="1400" b="0">
+              <a:rPr sz="1350" b="0">
                 <a:solidFill>
                   <a:srgbClr val="E9E6DF"/>
                 </a:solidFill>
@@ -5318,7 +5339,7 @@
                 <a:ea typeface="微软雅黑"/>
                 <a:cs typeface="微软雅黑"/>
               </a:rPr>
-              <a:t>知义 6 题：它的本义是什么？</a:t>
+              <a:t>知义：它的本义是什么？答对附一条汉字小知识</a:t>
             </a:r>
           </a:p>
           <a:p>
@@ -5331,7 +5352,7 @@
               </a:spcBef>
             </a:pPr>
             <a:r>
-              <a:rPr sz="1400" b="0">
+              <a:rPr sz="1350" b="0">
                 <a:solidFill>
                   <a:srgbClr val="E0B36A"/>
                 </a:solidFill>
@@ -5342,7 +5363,7 @@
               <a:t>•  </a:t>
             </a:r>
             <a:r>
-              <a:rPr sz="1400" b="0">
+              <a:rPr sz="1350" b="0">
                 <a:solidFill>
                   <a:srgbClr val="E9E6DF"/>
                 </a:solidFill>
@@ -5350,7 +5371,7 @@
                 <a:ea typeface="微软雅黑"/>
                 <a:cs typeface="微软雅黑"/>
               </a:rPr>
-              <a:t>辨体 4 题：两个字形，哪一个更早？</a:t>
+              <a:t>辨体：两个字形，哪一个更早？困难档比相邻字体</a:t>
             </a:r>
           </a:p>
           <a:p>
@@ -5363,7 +5384,7 @@
               </a:spcBef>
             </a:pPr>
             <a:r>
-              <a:rPr sz="1400" b="0">
+              <a:rPr sz="1350" b="0">
                 <a:solidFill>
                   <a:srgbClr val="E0B36A"/>
                 </a:solidFill>
@@ -5374,7 +5395,7 @@
               <a:t>•  </a:t>
             </a:r>
             <a:r>
-              <a:rPr sz="1400" b="0">
+              <a:rPr sz="1350" b="0">
                 <a:solidFill>
                   <a:srgbClr val="E9E6DF"/>
                 </a:solidFill>
@@ -5382,7 +5403,7 @@
                 <a:ea typeface="微软雅黑"/>
                 <a:cs typeface="微软雅黑"/>
               </a:rPr>
-              <a:t>实时总分；答对附一条汉字小知识</a:t>
+              <a:t>每轮随机抽题、跨轮不重样；实时总分</a:t>
             </a:r>
           </a:p>
         </p:txBody>

--- a/字生-演示课件.pptx
+++ b/字生-演示课件.pptx
@@ -5191,7 +5191,7 @@
       </p:sp>
       <p:pic>
         <p:nvPicPr>
-          <p:cNvPr id="6" name="Picture 5" descr="09-认字三关制.jpg"/>
+          <p:cNvPr id="6" name="Picture 5" descr="09认字.jpg"/>
           <p:cNvPicPr>
             <a:picLocks noChangeAspect="1"/>
           </p:cNvPicPr>
@@ -5680,7 +5680,7 @@
       </p:sp>
       <p:pic>
         <p:nvPicPr>
-          <p:cNvPr id="6" name="Picture 5" descr="10-字量数据文献口径与字库实录.jpg"/>
+          <p:cNvPr id="6" name="Picture 5" descr="10字量.jpg"/>
           <p:cNvPicPr>
             <a:picLocks noChangeAspect="1"/>
           </p:cNvPicPr>
@@ -9283,7 +9283,7 @@
       </p:sp>
       <p:pic>
         <p:nvPicPr>
-          <p:cNvPr id="6" name="Picture 5" descr="02-五体演变甲骨文一幕.jpg"/>
+          <p:cNvPr id="6" name="Picture 5" descr="02甲骨文.jpg"/>
           <p:cNvPicPr>
             <a:picLocks noChangeAspect="1"/>
           </p:cNvPicPr>
@@ -9761,7 +9761,7 @@
       </p:sp>
       <p:pic>
         <p:nvPicPr>
-          <p:cNvPr id="6" name="Picture 5" descr="03-新增一幕简帛.jpg"/>
+          <p:cNvPr id="6" name="Picture 5" descr="03简帛.jpg"/>
           <p:cNvPicPr>
             <a:picLocks noChangeAspect="1"/>
           </p:cNvPicPr>
@@ -10099,7 +10099,7 @@
       </p:sp>
       <p:pic>
         <p:nvPicPr>
-          <p:cNvPr id="6" name="Picture 5" descr="04-一字千年时间轴连续演化.jpg"/>
+          <p:cNvPr id="6" name="Picture 5" descr="04一字千年.jpg"/>
           <p:cNvPicPr>
             <a:picLocks noChangeAspect="1"/>
           </p:cNvPicPr>
@@ -10556,7 +10556,7 @@
       </p:sp>
       <p:pic>
         <p:nvPicPr>
-          <p:cNvPr id="6" name="Picture 5" descr="05-全量字库部首笔画检索.jpg"/>
+          <p:cNvPr id="6" name="Picture 5" descr="05字库检索.jpg"/>
           <p:cNvPicPr>
             <a:picLocks noChangeAspect="1"/>
           </p:cNvPicPr>
@@ -11013,7 +11013,7 @@
       </p:sp>
       <p:pic>
         <p:nvPicPr>
-          <p:cNvPr id="6" name="Picture 5" descr="06-构字.jpg"/>
+          <p:cNvPr id="6" name="Picture 5" descr="06构字.jpg"/>
           <p:cNvPicPr>
             <a:picLocks noChangeAspect="1"/>
           </p:cNvPicPr>
@@ -11028,7 +11028,7 @@
         <p:spPr>
           <a:xfrm>
             <a:off x="6812280" y="2121408"/>
-            <a:ext cx="4846320" cy="2499328"/>
+            <a:ext cx="4846320" cy="2726055"/>
           </a:xfrm>
           <a:prstGeom prst="rect">
             <a:avLst/>
@@ -11044,7 +11044,7 @@
         <p:spPr>
           <a:xfrm>
             <a:off x="6792163" y="2101291"/>
-            <a:ext cx="4886553" cy="2539561"/>
+            <a:ext cx="4886553" cy="2766288"/>
           </a:xfrm>
           <a:prstGeom prst="rect">
             <a:avLst/>
@@ -11523,7 +11523,7 @@
       </p:sp>
       <p:pic>
         <p:nvPicPr>
-          <p:cNvPr id="6" name="Picture 5" descr="07-手写识别HanScribe 引擎 Top-3.jpg"/>
+          <p:cNvPr id="6" name="Picture 5" descr="07手写识别.jpg"/>
           <p:cNvPicPr>
             <a:picLocks noChangeAspect="1"/>
           </p:cNvPicPr>
@@ -11882,7 +11882,7 @@
       </p:sp>
       <p:pic>
         <p:nvPicPr>
-          <p:cNvPr id="6" name="Picture 5" descr="08-名字图粒子星图与海报导出.jpg"/>
+          <p:cNvPr id="6" name="Picture 5" descr="08名字图.jpg"/>
           <p:cNvPicPr>
             <a:picLocks noChangeAspect="1"/>
           </p:cNvPicPr>
